--- a/Software_Engineering_Proposal_Presentation.pptx
+++ b/Software_Engineering_Proposal_Presentation.pptx
@@ -218,7 +218,7 @@
           <a:p>
             <a:fld id="{AA69A950-536D-45FE-A219-FA6F80C75D0B}" type="datetimeFigureOut">
               <a:rPr lang="en-US" smtClean="0"/>
-              <a:t>6/1/2026</a:t>
+              <a:t>6/4/2026</a:t>
             </a:fld>
             <a:endParaRPr lang="en-US"/>
           </a:p>
@@ -751,7 +751,7 @@
           <a:p>
             <a:fld id="{5BCAD085-E8A6-8845-BD4E-CB4CCA059FC4}" type="datetimeFigureOut">
               <a:rPr lang="en-US" smtClean="0"/>
-              <a:t>6/1/2026</a:t>
+              <a:t>6/4/2026</a:t>
             </a:fld>
             <a:endParaRPr lang="en-US"/>
           </a:p>
@@ -921,7 +921,7 @@
           <a:p>
             <a:fld id="{5BCAD085-E8A6-8845-BD4E-CB4CCA059FC4}" type="datetimeFigureOut">
               <a:rPr lang="en-US" smtClean="0"/>
-              <a:t>6/1/2026</a:t>
+              <a:t>6/4/2026</a:t>
             </a:fld>
             <a:endParaRPr lang="en-US"/>
           </a:p>
@@ -1101,7 +1101,7 @@
           <a:p>
             <a:fld id="{5BCAD085-E8A6-8845-BD4E-CB4CCA059FC4}" type="datetimeFigureOut">
               <a:rPr lang="en-US" smtClean="0"/>
-              <a:t>6/1/2026</a:t>
+              <a:t>6/4/2026</a:t>
             </a:fld>
             <a:endParaRPr lang="en-US"/>
           </a:p>
@@ -1271,7 +1271,7 @@
           <a:p>
             <a:fld id="{5BCAD085-E8A6-8845-BD4E-CB4CCA059FC4}" type="datetimeFigureOut">
               <a:rPr lang="en-US" smtClean="0"/>
-              <a:t>6/1/2026</a:t>
+              <a:t>6/4/2026</a:t>
             </a:fld>
             <a:endParaRPr lang="en-US"/>
           </a:p>
@@ -1517,7 +1517,7 @@
           <a:p>
             <a:fld id="{5BCAD085-E8A6-8845-BD4E-CB4CCA059FC4}" type="datetimeFigureOut">
               <a:rPr lang="en-US" smtClean="0"/>
-              <a:t>6/1/2026</a:t>
+              <a:t>6/4/2026</a:t>
             </a:fld>
             <a:endParaRPr lang="en-US"/>
           </a:p>
@@ -1805,7 +1805,7 @@
           <a:p>
             <a:fld id="{5BCAD085-E8A6-8845-BD4E-CB4CCA059FC4}" type="datetimeFigureOut">
               <a:rPr lang="en-US" smtClean="0"/>
-              <a:t>6/1/2026</a:t>
+              <a:t>6/4/2026</a:t>
             </a:fld>
             <a:endParaRPr lang="en-US"/>
           </a:p>
@@ -2227,7 +2227,7 @@
           <a:p>
             <a:fld id="{5BCAD085-E8A6-8845-BD4E-CB4CCA059FC4}" type="datetimeFigureOut">
               <a:rPr lang="en-US" smtClean="0"/>
-              <a:t>6/1/2026</a:t>
+              <a:t>6/4/2026</a:t>
             </a:fld>
             <a:endParaRPr lang="en-US"/>
           </a:p>
@@ -2345,7 +2345,7 @@
           <a:p>
             <a:fld id="{5BCAD085-E8A6-8845-BD4E-CB4CCA059FC4}" type="datetimeFigureOut">
               <a:rPr lang="en-US" smtClean="0"/>
-              <a:t>6/1/2026</a:t>
+              <a:t>6/4/2026</a:t>
             </a:fld>
             <a:endParaRPr lang="en-US"/>
           </a:p>
@@ -2440,7 +2440,7 @@
           <a:p>
             <a:fld id="{5BCAD085-E8A6-8845-BD4E-CB4CCA059FC4}" type="datetimeFigureOut">
               <a:rPr lang="en-US" smtClean="0"/>
-              <a:t>6/1/2026</a:t>
+              <a:t>6/4/2026</a:t>
             </a:fld>
             <a:endParaRPr lang="en-US"/>
           </a:p>
@@ -2717,7 +2717,7 @@
           <a:p>
             <a:fld id="{5BCAD085-E8A6-8845-BD4E-CB4CCA059FC4}" type="datetimeFigureOut">
               <a:rPr lang="en-US" smtClean="0"/>
-              <a:t>6/1/2026</a:t>
+              <a:t>6/4/2026</a:t>
             </a:fld>
             <a:endParaRPr lang="en-US"/>
           </a:p>
@@ -2970,7 +2970,7 @@
           <a:p>
             <a:fld id="{5BCAD085-E8A6-8845-BD4E-CB4CCA059FC4}" type="datetimeFigureOut">
               <a:rPr lang="en-US" smtClean="0"/>
-              <a:t>6/1/2026</a:t>
+              <a:t>6/4/2026</a:t>
             </a:fld>
             <a:endParaRPr lang="en-US"/>
           </a:p>
@@ -3183,7 +3183,7 @@
           <a:p>
             <a:fld id="{5BCAD085-E8A6-8845-BD4E-CB4CCA059FC4}" type="datetimeFigureOut">
               <a:rPr lang="en-US" smtClean="0"/>
-              <a:t>6/1/2026</a:t>
+              <a:t>6/4/2026</a:t>
             </a:fld>
             <a:endParaRPr lang="en-US"/>
           </a:p>
@@ -6029,7 +6029,7 @@
         <p:spPr>
           <a:xfrm>
             <a:off x="8412480" y="1463040"/>
-            <a:ext cx="2029723" cy="707886"/>
+            <a:ext cx="2861681" cy="707886"/>
           </a:xfrm>
           <a:prstGeom prst="rect">
             <a:avLst/>
@@ -6050,7 +6050,7 @@
               </a:defRPr>
             </a:pPr>
             <a:r>
-              <a:rPr sz="2800">
+              <a:rPr sz="2800" dirty="0">
                 <a:latin typeface="Times New Roman" panose="02020603050405020304" pitchFamily="18" charset="0"/>
                 <a:cs typeface="Times New Roman" panose="02020603050405020304" pitchFamily="18" charset="0"/>
               </a:rPr>
@@ -6066,11 +6066,32 @@
               </a:defRPr>
             </a:pPr>
             <a:r>
-              <a:rPr sz="1200">
+              <a:rPr sz="1200" dirty="0">
                 <a:latin typeface="Times New Roman" panose="02020603050405020304" pitchFamily="18" charset="0"/>
                 <a:cs typeface="Times New Roman" panose="02020603050405020304" pitchFamily="18" charset="0"/>
               </a:rPr>
-              <a:t>• Reserve parking slots online</a:t>
+              <a:t>• Reserve parking slots </a:t>
+            </a:r>
+            <a:r>
+              <a:rPr sz="1200" dirty="0" smtClean="0">
+                <a:latin typeface="Times New Roman" panose="02020603050405020304" pitchFamily="18" charset="0"/>
+                <a:cs typeface="Times New Roman" panose="02020603050405020304" pitchFamily="18" charset="0"/>
+              </a:rPr>
+              <a:t>online</a:t>
+            </a:r>
+            <a:r>
+              <a:rPr lang="en-US" sz="1200" dirty="0">
+                <a:latin typeface="Times New Roman" panose="02020603050405020304" pitchFamily="18" charset="0"/>
+                <a:cs typeface="Times New Roman" panose="02020603050405020304" pitchFamily="18" charset="0"/>
+              </a:rPr>
+              <a:t> </a:t>
+            </a:r>
+            <a:r>
+              <a:rPr lang="en-US" sz="1200" dirty="0" smtClean="0">
+                <a:latin typeface="Times New Roman" panose="02020603050405020304" pitchFamily="18" charset="0"/>
+                <a:cs typeface="Times New Roman" panose="02020603050405020304" pitchFamily="18" charset="0"/>
+              </a:rPr>
+              <a:t>and payment</a:t>
             </a:r>
           </a:p>
         </p:txBody>
